--- a/demo/sales-deck/Kanan_Clinic_Booking_Demo_Deck.pptx
+++ b/demo/sales-deck/Kanan_Clinic_Booking_Demo_Deck.pptx
@@ -13746,7 +13746,7 @@
                 </a:solidFill>
                 <a:latin typeface="Helvetica"/>
               </a:rPr>
-              <a:t>Kanan Digital Enterprise (SSM Enterprise registration in progress) · Kuala Lumpur, Malaysia</a:t>
+              <a:t>Kanan Digital Enterprise (SSM Reg: AS0516554-D) · Kuala Lumpur, Malaysia</a:t>
             </a:r>
           </a:p>
         </p:txBody>

--- a/demo/sales-deck/Kanan_Clinic_Booking_Demo_Deck.pptx
+++ b/demo/sales-deck/Kanan_Clinic_Booking_Demo_Deck.pptx
@@ -13746,7 +13746,7 @@
                 </a:solidFill>
                 <a:latin typeface="Helvetica"/>
               </a:rPr>
-              <a:t>Kanan Digital Enterprise (SSM Reg: AS0516554-D) · Kuala Lumpur, Malaysia</a:t>
+              <a:t>Kanan Digital Enterprise (SSM Reg: 2026060600274 / AS0516554-D) · Kuala Lumpur, Malaysia</a:t>
             </a:r>
           </a:p>
         </p:txBody>
